--- a/presentations/CopilotSlideAgent.pptx
+++ b/presentations/CopilotSlideAgent.pptx
@@ -7,6 +7,7 @@
   <p:sldIdLst>
     <p:sldId id="256" r:id="rId7"/>
     <p:sldId id="257" r:id="rId8"/>
+    <p:sldId id="258" r:id="rId9"/>
   </p:sldIdLst>
   <p:sldSz cx="9144000" cy="5144400" type="screen4x3"/>
   <p:notesSz cx="6858000" cy="9144000"/>
@@ -3444,7 +3445,7 @@
         <p:spPr>
           <a:xfrm>
             <a:off x="571500" y="1723548"/>
-            <a:ext cx="1852731" cy="173355"/>
+            <a:ext cx="2931866" cy="173355"/>
           </a:xfrm>
           <a:prstGeom prst="rect">
             <a:avLst/>
@@ -3472,7 +3473,7 @@
                 </a:solidFill>
                 <a:latin typeface="Segoe UI"/>
               </a:rPr>
-              <a:t>顧客向け技術スライドを作るのに</a:t>
+              <a:t>Creating customer-facing technical slides</a:t>
             </a:r>
           </a:p>
         </p:txBody>
@@ -3486,7 +3487,7 @@
         <p:spPr>
           <a:xfrm>
             <a:off x="571500" y="1914048"/>
-            <a:ext cx="1644705" cy="173355"/>
+            <a:ext cx="1885235" cy="173355"/>
           </a:xfrm>
           <a:prstGeom prst="rect">
             <a:avLst/>
@@ -3514,7 +3515,7 @@
                 </a:solidFill>
                 <a:latin typeface="Segoe UI"/>
               </a:rPr>
-              <a:t>毎回 2〜3 時間かかっている</a:t>
+              <a:t>takes 2–3 hours every time</a:t>
             </a:r>
           </a:p>
         </p:txBody>
@@ -3528,7 +3529,7 @@
         <p:spPr>
           <a:xfrm>
             <a:off x="714375" y="2207895"/>
-            <a:ext cx="1662207" cy="160019"/>
+            <a:ext cx="2730341" cy="160019"/>
           </a:xfrm>
           <a:prstGeom prst="rect">
             <a:avLst/>
@@ -3556,7 +3557,7 @@
                 </a:solidFill>
                 <a:latin typeface="Segoe UI"/>
               </a:rPr>
-              <a:t>① MS Learn で最新情報を調査</a:t>
+              <a:t>① Search MS Learn for latest product info</a:t>
             </a:r>
           </a:p>
         </p:txBody>
@@ -3570,7 +3571,7 @@
         <p:spPr>
           <a:xfrm>
             <a:off x="714375" y="2398395"/>
-            <a:ext cx="1980247" cy="160019"/>
+            <a:ext cx="2664332" cy="160019"/>
           </a:xfrm>
           <a:prstGeom prst="rect">
             <a:avLst/>
@@ -3598,7 +3599,7 @@
                 </a:solidFill>
                 <a:latin typeface="Segoe UI"/>
               </a:rPr>
-              <a:t>② 内容を構造化してスライドに落とす</a:t>
+              <a:t>② Structure content into slide narrative</a:t>
             </a:r>
           </a:p>
         </p:txBody>
@@ -3612,7 +3613,7 @@
         <p:spPr>
           <a:xfrm>
             <a:off x="714375" y="2588895"/>
-            <a:ext cx="1980247" cy="160019"/>
+            <a:ext cx="2466308" cy="160019"/>
           </a:xfrm>
           <a:prstGeom prst="rect">
             <a:avLst/>
@@ -3640,7 +3641,7 @@
                 </a:solidFill>
                 <a:latin typeface="Segoe UI"/>
               </a:rPr>
-              <a:t>③ 図表・レイアウトを手作業で整える</a:t>
+              <a:t>③ Manually build diagrams and layouts</a:t>
             </a:r>
           </a:p>
         </p:txBody>
@@ -3654,7 +3655,7 @@
         <p:spPr>
           <a:xfrm>
             <a:off x="714375" y="2779395"/>
-            <a:ext cx="1524190" cy="160019"/>
+            <a:ext cx="2202275" cy="160019"/>
           </a:xfrm>
           <a:prstGeom prst="rect">
             <a:avLst/>
@@ -3682,7 +3683,7 @@
                 </a:solidFill>
                 <a:latin typeface="Segoe UI"/>
               </a:rPr>
-              <a:t>④ レビュー・修正を繰り返す</a:t>
+              <a:t>④ Review and iterate for accuracy</a:t>
             </a:r>
           </a:p>
         </p:txBody>
@@ -3786,7 +3787,7 @@
         <p:spPr>
           <a:xfrm>
             <a:off x="4953000" y="1723548"/>
-            <a:ext cx="2496312" cy="173355"/>
+            <a:ext cx="2860357" cy="173355"/>
           </a:xfrm>
           <a:prstGeom prst="rect">
             <a:avLst/>
@@ -3814,7 +3815,7 @@
                 </a:solidFill>
                 <a:latin typeface="Segoe UI"/>
               </a:rPr>
-              <a:t>プロンプト 1 行で調査から PPTX 生成まで</a:t>
+              <a:t>One prompt automates the entire pipeline</a:t>
             </a:r>
           </a:p>
         </p:txBody>
@@ -3828,7 +3829,7 @@
         <p:spPr>
           <a:xfrm>
             <a:off x="4953000" y="1914048"/>
-            <a:ext cx="1397674" cy="173355"/>
+            <a:ext cx="2814851" cy="173355"/>
           </a:xfrm>
           <a:prstGeom prst="rect">
             <a:avLst/>
@@ -3856,7 +3857,7 @@
                 </a:solidFill>
                 <a:latin typeface="Segoe UI"/>
               </a:rPr>
-              <a:t>全自動。約 10 分で完了</a:t>
+              <a:t>from research to PPTX — done in ~10 min</a:t>
             </a:r>
           </a:p>
         </p:txBody>
@@ -3870,7 +3871,7 @@
         <p:spPr>
           <a:xfrm>
             <a:off x="5095875" y="2207895"/>
-            <a:ext cx="2316289" cy="160019"/>
+            <a:ext cx="2358294" cy="160019"/>
           </a:xfrm>
           <a:prstGeom prst="rect">
             <a:avLst/>
@@ -3898,7 +3899,7 @@
                 </a:solidFill>
                 <a:latin typeface="Segoe UI"/>
               </a:rPr>
-              <a:t>✅ Copilot SDK が MS Learn を自動調査</a:t>
+              <a:t>✅ Copilot SDK auto-queries MS Learn</a:t>
             </a:r>
           </a:p>
         </p:txBody>
@@ -3912,7 +3913,7 @@
         <p:spPr>
           <a:xfrm>
             <a:off x="5095875" y="2398395"/>
-            <a:ext cx="2304288" cy="160019"/>
+            <a:ext cx="2754344" cy="160019"/>
           </a:xfrm>
           <a:prstGeom prst="rect">
             <a:avLst/>
@@ -3940,7 +3941,7 @@
                 </a:solidFill>
                 <a:latin typeface="Segoe UI"/>
               </a:rPr>
-              <a:t>✅ AI が SVG スライドを生成（図表込み）</a:t>
+              <a:t>✅ AI generates SVG slides (with diagrams)</a:t>
             </a:r>
           </a:p>
         </p:txBody>
@@ -3954,7 +3955,7 @@
         <p:spPr>
           <a:xfrm>
             <a:off x="5095875" y="2588895"/>
-            <a:ext cx="2394299" cy="160019"/>
+            <a:ext cx="2622327" cy="160019"/>
           </a:xfrm>
           <a:prstGeom prst="rect">
             <a:avLst/>
@@ -3982,7 +3983,7 @@
                 </a:solidFill>
                 <a:latin typeface="Segoe UI"/>
               </a:rPr>
-              <a:t>✅ svg2pptx.py で編集可能な PPTX に変換</a:t>
+              <a:t>✅ svg2pptx.py converts to editable PPTX</a:t>
             </a:r>
           </a:p>
         </p:txBody>
@@ -3996,7 +3997,7 @@
         <p:spPr>
           <a:xfrm>
             <a:off x="5095875" y="2779395"/>
-            <a:ext cx="2376297" cy="160019"/>
+            <a:ext cx="2424302" cy="160019"/>
           </a:xfrm>
           <a:prstGeom prst="rect">
             <a:avLst/>
@@ -4024,7 +4025,7 @@
                 </a:solidFill>
                 <a:latin typeface="Segoe UI"/>
               </a:rPr>
-              <a:t>✅ Azure Blob 経由で Web アプリから取得</a:t>
+              <a:t>✅ Delivered via Azure Blob + web app</a:t>
             </a:r>
           </a:p>
         </p:txBody>
@@ -8148,6 +8149,1810 @@
       <p:sp>
         <p:nvSpPr>
           <p:cNvPr id="74" name="TextBox 73"/>
+          <p:cNvSpPr txBox="1"/>
+          <p:nvPr/>
+        </p:nvSpPr>
+        <p:spPr>
+          <a:xfrm>
+            <a:off x="7334250" y="310991"/>
+            <a:ext cx="1089136" cy="146685"/>
+          </a:xfrm>
+          <a:prstGeom prst="rect">
+            <a:avLst/>
+          </a:prstGeom>
+          <a:noFill/>
+        </p:spPr>
+        <p:txBody>
+          <a:bodyPr wrap="none" lIns="0" tIns="0" rIns="0" bIns="0">
+            <a:spAutoFit/>
+          </a:bodyPr>
+          <a:lstStyle/>
+          <a:p>
+            <a:pPr algn="l">
+              <a:spcBef>
+                <a:spcPts val="0"/>
+              </a:spcBef>
+              <a:spcAft>
+                <a:spcPts val="0"/>
+              </a:spcAft>
+            </a:pPr>
+            <a:r>
+              <a:rPr sz="825" b="1">
+                <a:solidFill>
+                  <a:srgbClr val="FFFFFF"/>
+                </a:solidFill>
+                <a:latin typeface="Segoe UI"/>
+              </a:rPr>
+              <a:t>GitHub Copilot SDK</a:t>
+            </a:r>
+          </a:p>
+        </p:txBody>
+      </p:sp>
+    </p:spTree>
+  </p:cSld>
+  <p:clrMapOvr>
+    <a:masterClrMapping/>
+  </p:clrMapOvr>
+</p:sld>
+</file>
+
+<file path=ppt/slides/slide3.xml><?xml version="1.0" encoding="utf-8"?>
+<p:sld xmlns:a="http://schemas.openxmlformats.org/drawingml/2006/main" xmlns:p="http://schemas.openxmlformats.org/presentationml/2006/main" xmlns:r="http://schemas.openxmlformats.org/officeDocument/2006/relationships">
+  <p:cSld>
+    <p:spTree>
+      <p:nvGrpSpPr>
+        <p:cNvPr id="1" name=""/>
+        <p:cNvGrpSpPr/>
+        <p:nvPr/>
+      </p:nvGrpSpPr>
+      <p:grpSpPr/>
+      <p:sp>
+        <p:nvSpPr>
+          <p:cNvPr id="2" name="Rectangle 1"/>
+          <p:cNvSpPr/>
+          <p:nvPr/>
+        </p:nvSpPr>
+        <p:spPr>
+          <a:xfrm>
+            <a:off x="0" y="0"/>
+            <a:ext cx="9144000" cy="5143500"/>
+          </a:xfrm>
+          <a:prstGeom prst="rect">
+            <a:avLst/>
+          </a:prstGeom>
+          <a:solidFill>
+            <a:srgbClr val="0D1117"/>
+          </a:solidFill>
+          <a:ln>
+            <a:noFill/>
+          </a:ln>
+          <a:effectLst/>
+        </p:spPr>
+        <p:style>
+          <a:lnRef idx="1">
+            <a:schemeClr val="accent1"/>
+          </a:lnRef>
+          <a:fillRef idx="3">
+            <a:schemeClr val="accent1"/>
+          </a:fillRef>
+          <a:effectRef idx="2">
+            <a:schemeClr val="accent1"/>
+          </a:effectRef>
+          <a:fontRef idx="minor">
+            <a:schemeClr val="lt1"/>
+          </a:fontRef>
+        </p:style>
+        <p:txBody>
+          <a:bodyPr rtlCol="0" anchor="ctr"/>
+          <a:lstStyle/>
+          <a:p>
+            <a:pPr algn="ctr"/>
+          </a:p>
+        </p:txBody>
+      </p:sp>
+      <p:sp>
+        <p:nvSpPr>
+          <p:cNvPr id="3" name="Rectangle 2"/>
+          <p:cNvSpPr/>
+          <p:nvPr/>
+        </p:nvSpPr>
+        <p:spPr>
+          <a:xfrm>
+            <a:off x="0" y="0"/>
+            <a:ext cx="9144000" cy="38100"/>
+          </a:xfrm>
+          <a:prstGeom prst="rect">
+            <a:avLst/>
+          </a:prstGeom>
+          <a:solidFill>
+            <a:srgbClr val="6E40C9"/>
+          </a:solidFill>
+          <a:ln>
+            <a:noFill/>
+          </a:ln>
+          <a:effectLst/>
+        </p:spPr>
+        <p:style>
+          <a:lnRef idx="1">
+            <a:schemeClr val="accent1"/>
+          </a:lnRef>
+          <a:fillRef idx="3">
+            <a:schemeClr val="accent1"/>
+          </a:fillRef>
+          <a:effectRef idx="2">
+            <a:schemeClr val="accent1"/>
+          </a:effectRef>
+          <a:fontRef idx="minor">
+            <a:schemeClr val="lt1"/>
+          </a:fontRef>
+        </p:style>
+        <p:txBody>
+          <a:bodyPr rtlCol="0" anchor="ctr"/>
+          <a:lstStyle/>
+          <a:p>
+            <a:pPr algn="ctr"/>
+          </a:p>
+        </p:txBody>
+      </p:sp>
+      <p:sp>
+        <p:nvSpPr>
+          <p:cNvPr id="4" name="TextBox 3"/>
+          <p:cNvSpPr txBox="1"/>
+          <p:nvPr/>
+        </p:nvSpPr>
+        <p:spPr>
+          <a:xfrm>
+            <a:off x="571500" y="407670"/>
+            <a:ext cx="3344418" cy="426720"/>
+          </a:xfrm>
+          <a:prstGeom prst="rect">
+            <a:avLst/>
+          </a:prstGeom>
+          <a:noFill/>
+        </p:spPr>
+        <p:txBody>
+          <a:bodyPr wrap="none" lIns="0" tIns="0" rIns="0" bIns="0">
+            <a:spAutoFit/>
+          </a:bodyPr>
+          <a:lstStyle/>
+          <a:p>
+            <a:pPr algn="l">
+              <a:spcBef>
+                <a:spcPts val="0"/>
+              </a:spcBef>
+              <a:spcAft>
+                <a:spcPts val="0"/>
+              </a:spcAft>
+            </a:pPr>
+            <a:r>
+              <a:rPr sz="2400" b="1">
+                <a:solidFill>
+                  <a:srgbClr val="FFFFFF"/>
+                </a:solidFill>
+                <a:latin typeface="Segoe UI"/>
+              </a:rPr>
+              <a:t>Copilot Slide Agent</a:t>
+            </a:r>
+          </a:p>
+        </p:txBody>
+      </p:sp>
+      <p:sp>
+        <p:nvSpPr>
+          <p:cNvPr id="5" name="TextBox 4"/>
+          <p:cNvSpPr txBox="1"/>
+          <p:nvPr/>
+        </p:nvSpPr>
+        <p:spPr>
+          <a:xfrm>
+            <a:off x="571500" y="870585"/>
+            <a:ext cx="5312664" cy="213360"/>
+          </a:xfrm>
+          <a:prstGeom prst="rect">
+            <a:avLst/>
+          </a:prstGeom>
+          <a:noFill/>
+        </p:spPr>
+        <p:txBody>
+          <a:bodyPr wrap="none" lIns="0" tIns="0" rIns="0" bIns="0">
+            <a:spAutoFit/>
+          </a:bodyPr>
+          <a:lstStyle/>
+          <a:p>
+            <a:pPr algn="l">
+              <a:spcBef>
+                <a:spcPts val="0"/>
+              </a:spcBef>
+              <a:spcAft>
+                <a:spcPts val="0"/>
+              </a:spcAft>
+            </a:pPr>
+            <a:r>
+              <a:rPr sz="1200">
+                <a:solidFill>
+                  <a:srgbClr val="8B949E"/>
+                </a:solidFill>
+                <a:latin typeface="Segoe UI"/>
+              </a:rPr>
+              <a:t>One Prompt → Editable PowerPoint with Diagrams in 10 Minutes</a:t>
+            </a:r>
+          </a:p>
+        </p:txBody>
+      </p:sp>
+      <p:sp>
+        <p:nvSpPr>
+          <p:cNvPr id="6" name="TextBox 5"/>
+          <p:cNvSpPr txBox="1"/>
+          <p:nvPr/>
+        </p:nvSpPr>
+        <p:spPr>
+          <a:xfrm>
+            <a:off x="6667500" y="577691"/>
+            <a:ext cx="1452181" cy="146685"/>
+          </a:xfrm>
+          <a:prstGeom prst="rect">
+            <a:avLst/>
+          </a:prstGeom>
+          <a:noFill/>
+        </p:spPr>
+        <p:txBody>
+          <a:bodyPr wrap="none" lIns="0" tIns="0" rIns="0" bIns="0">
+            <a:spAutoFit/>
+          </a:bodyPr>
+          <a:lstStyle/>
+          <a:p>
+            <a:pPr algn="l">
+              <a:spcBef>
+                <a:spcPts val="0"/>
+              </a:spcBef>
+              <a:spcAft>
+                <a:spcPts val="0"/>
+              </a:spcAft>
+            </a:pPr>
+            <a:r>
+              <a:rPr sz="825">
+                <a:solidFill>
+                  <a:srgbClr val="58A6FF"/>
+                </a:solidFill>
+                <a:latin typeface="Segoe UI"/>
+              </a:rPr>
+              <a:t>github.com/kanazawazawa/</a:t>
+            </a:r>
+          </a:p>
+        </p:txBody>
+      </p:sp>
+      <p:sp>
+        <p:nvSpPr>
+          <p:cNvPr id="7" name="TextBox 6"/>
+          <p:cNvSpPr txBox="1"/>
+          <p:nvPr/>
+        </p:nvSpPr>
+        <p:spPr>
+          <a:xfrm>
+            <a:off x="6667500" y="749141"/>
+            <a:ext cx="1391673" cy="146685"/>
+          </a:xfrm>
+          <a:prstGeom prst="rect">
+            <a:avLst/>
+          </a:prstGeom>
+          <a:noFill/>
+        </p:spPr>
+        <p:txBody>
+          <a:bodyPr wrap="none" lIns="0" tIns="0" rIns="0" bIns="0">
+            <a:spAutoFit/>
+          </a:bodyPr>
+          <a:lstStyle/>
+          <a:p>
+            <a:pPr algn="l">
+              <a:spcBef>
+                <a:spcPts val="0"/>
+              </a:spcBef>
+              <a:spcAft>
+                <a:spcPts val="0"/>
+              </a:spcAft>
+            </a:pPr>
+            <a:r>
+              <a:rPr sz="825">
+                <a:solidFill>
+                  <a:srgbClr val="58A6FF"/>
+                </a:solidFill>
+                <a:latin typeface="Segoe UI"/>
+              </a:rPr>
+              <a:t>copilot-agent-workspace</a:t>
+            </a:r>
+          </a:p>
+        </p:txBody>
+      </p:sp>
+      <p:sp>
+        <p:nvSpPr>
+          <p:cNvPr id="8" name="Rounded Rectangle 7"/>
+          <p:cNvSpPr/>
+          <p:nvPr/>
+        </p:nvSpPr>
+        <p:spPr>
+          <a:xfrm>
+            <a:off x="381000" y="1238250"/>
+            <a:ext cx="4000500" cy="1714500"/>
+          </a:xfrm>
+          <a:prstGeom prst="roundRect">
+            <a:avLst>
+              <a:gd name="adj" fmla="val 4444"/>
+            </a:avLst>
+          </a:prstGeom>
+          <a:solidFill>
+            <a:srgbClr val="161B22"/>
+          </a:solidFill>
+          <a:ln w="12700">
+            <a:solidFill>
+              <a:srgbClr val="30363D"/>
+            </a:solidFill>
+          </a:ln>
+          <a:effectLst/>
+        </p:spPr>
+        <p:style>
+          <a:lnRef idx="1">
+            <a:schemeClr val="accent1"/>
+          </a:lnRef>
+          <a:fillRef idx="3">
+            <a:schemeClr val="accent1"/>
+          </a:fillRef>
+          <a:effectRef idx="2">
+            <a:schemeClr val="accent1"/>
+          </a:effectRef>
+          <a:fontRef idx="minor">
+            <a:schemeClr val="lt1"/>
+          </a:fontRef>
+        </p:style>
+        <p:txBody>
+          <a:bodyPr rtlCol="0" anchor="ctr"/>
+          <a:lstStyle/>
+          <a:p>
+            <a:pPr algn="ctr"/>
+          </a:p>
+        </p:txBody>
+      </p:sp>
+      <p:sp>
+        <p:nvSpPr>
+          <p:cNvPr id="9" name="TextBox 8"/>
+          <p:cNvSpPr txBox="1"/>
+          <p:nvPr/>
+        </p:nvSpPr>
+        <p:spPr>
+          <a:xfrm>
+            <a:off x="571500" y="1378267"/>
+            <a:ext cx="693086" cy="240030"/>
+          </a:xfrm>
+          <a:prstGeom prst="rect">
+            <a:avLst/>
+          </a:prstGeom>
+          <a:noFill/>
+        </p:spPr>
+        <p:txBody>
+          <a:bodyPr wrap="none" lIns="0" tIns="0" rIns="0" bIns="0">
+            <a:spAutoFit/>
+          </a:bodyPr>
+          <a:lstStyle/>
+          <a:p>
+            <a:pPr algn="l">
+              <a:spcBef>
+                <a:spcPts val="0"/>
+              </a:spcBef>
+              <a:spcAft>
+                <a:spcPts val="0"/>
+              </a:spcAft>
+            </a:pPr>
+            <a:r>
+              <a:rPr sz="1350" b="1">
+                <a:solidFill>
+                  <a:srgbClr val="F85149"/>
+                </a:solidFill>
+                <a:latin typeface="Segoe UI"/>
+              </a:rPr>
+              <a:t>Problem</a:t>
+            </a:r>
+          </a:p>
+        </p:txBody>
+      </p:sp>
+      <p:sp>
+        <p:nvSpPr>
+          <p:cNvPr id="10" name="TextBox 9"/>
+          <p:cNvSpPr txBox="1"/>
+          <p:nvPr/>
+        </p:nvSpPr>
+        <p:spPr>
+          <a:xfrm>
+            <a:off x="571500" y="1723548"/>
+            <a:ext cx="1852731" cy="173355"/>
+          </a:xfrm>
+          <a:prstGeom prst="rect">
+            <a:avLst/>
+          </a:prstGeom>
+          <a:noFill/>
+        </p:spPr>
+        <p:txBody>
+          <a:bodyPr wrap="none" lIns="0" tIns="0" rIns="0" bIns="0">
+            <a:spAutoFit/>
+          </a:bodyPr>
+          <a:lstStyle/>
+          <a:p>
+            <a:pPr algn="l">
+              <a:spcBef>
+                <a:spcPts val="0"/>
+              </a:spcBef>
+              <a:spcAft>
+                <a:spcPts val="0"/>
+              </a:spcAft>
+            </a:pPr>
+            <a:r>
+              <a:rPr sz="975">
+                <a:solidFill>
+                  <a:srgbClr val="C9D1D9"/>
+                </a:solidFill>
+                <a:latin typeface="Segoe UI"/>
+              </a:rPr>
+              <a:t>顧客向け技術スライドを作るのに</a:t>
+            </a:r>
+          </a:p>
+        </p:txBody>
+      </p:sp>
+      <p:sp>
+        <p:nvSpPr>
+          <p:cNvPr id="11" name="TextBox 10"/>
+          <p:cNvSpPr txBox="1"/>
+          <p:nvPr/>
+        </p:nvSpPr>
+        <p:spPr>
+          <a:xfrm>
+            <a:off x="571500" y="1914048"/>
+            <a:ext cx="1644705" cy="173355"/>
+          </a:xfrm>
+          <a:prstGeom prst="rect">
+            <a:avLst/>
+          </a:prstGeom>
+          <a:noFill/>
+        </p:spPr>
+        <p:txBody>
+          <a:bodyPr wrap="none" lIns="0" tIns="0" rIns="0" bIns="0">
+            <a:spAutoFit/>
+          </a:bodyPr>
+          <a:lstStyle/>
+          <a:p>
+            <a:pPr algn="l">
+              <a:spcBef>
+                <a:spcPts val="0"/>
+              </a:spcBef>
+              <a:spcAft>
+                <a:spcPts val="0"/>
+              </a:spcAft>
+            </a:pPr>
+            <a:r>
+              <a:rPr sz="975">
+                <a:solidFill>
+                  <a:srgbClr val="C9D1D9"/>
+                </a:solidFill>
+                <a:latin typeface="Segoe UI"/>
+              </a:rPr>
+              <a:t>毎回 2〜3 時間かかっている</a:t>
+            </a:r>
+          </a:p>
+        </p:txBody>
+      </p:sp>
+      <p:sp>
+        <p:nvSpPr>
+          <p:cNvPr id="12" name="TextBox 11"/>
+          <p:cNvSpPr txBox="1"/>
+          <p:nvPr/>
+        </p:nvSpPr>
+        <p:spPr>
+          <a:xfrm>
+            <a:off x="714375" y="2207895"/>
+            <a:ext cx="1662207" cy="160019"/>
+          </a:xfrm>
+          <a:prstGeom prst="rect">
+            <a:avLst/>
+          </a:prstGeom>
+          <a:noFill/>
+        </p:spPr>
+        <p:txBody>
+          <a:bodyPr wrap="none" lIns="0" tIns="0" rIns="0" bIns="0">
+            <a:spAutoFit/>
+          </a:bodyPr>
+          <a:lstStyle/>
+          <a:p>
+            <a:pPr algn="l">
+              <a:spcBef>
+                <a:spcPts val="0"/>
+              </a:spcBef>
+              <a:spcAft>
+                <a:spcPts val="0"/>
+              </a:spcAft>
+            </a:pPr>
+            <a:r>
+              <a:rPr sz="900">
+                <a:solidFill>
+                  <a:srgbClr val="8B949E"/>
+                </a:solidFill>
+                <a:latin typeface="Segoe UI"/>
+              </a:rPr>
+              <a:t>① MS Learn で最新情報を調査</a:t>
+            </a:r>
+          </a:p>
+        </p:txBody>
+      </p:sp>
+      <p:sp>
+        <p:nvSpPr>
+          <p:cNvPr id="13" name="TextBox 12"/>
+          <p:cNvSpPr txBox="1"/>
+          <p:nvPr/>
+        </p:nvSpPr>
+        <p:spPr>
+          <a:xfrm>
+            <a:off x="714375" y="2398395"/>
+            <a:ext cx="1980247" cy="160019"/>
+          </a:xfrm>
+          <a:prstGeom prst="rect">
+            <a:avLst/>
+          </a:prstGeom>
+          <a:noFill/>
+        </p:spPr>
+        <p:txBody>
+          <a:bodyPr wrap="none" lIns="0" tIns="0" rIns="0" bIns="0">
+            <a:spAutoFit/>
+          </a:bodyPr>
+          <a:lstStyle/>
+          <a:p>
+            <a:pPr algn="l">
+              <a:spcBef>
+                <a:spcPts val="0"/>
+              </a:spcBef>
+              <a:spcAft>
+                <a:spcPts val="0"/>
+              </a:spcAft>
+            </a:pPr>
+            <a:r>
+              <a:rPr sz="900">
+                <a:solidFill>
+                  <a:srgbClr val="8B949E"/>
+                </a:solidFill>
+                <a:latin typeface="Segoe UI"/>
+              </a:rPr>
+              <a:t>② 内容を構造化してスライドに落とす</a:t>
+            </a:r>
+          </a:p>
+        </p:txBody>
+      </p:sp>
+      <p:sp>
+        <p:nvSpPr>
+          <p:cNvPr id="14" name="TextBox 13"/>
+          <p:cNvSpPr txBox="1"/>
+          <p:nvPr/>
+        </p:nvSpPr>
+        <p:spPr>
+          <a:xfrm>
+            <a:off x="714375" y="2588895"/>
+            <a:ext cx="1980247" cy="160019"/>
+          </a:xfrm>
+          <a:prstGeom prst="rect">
+            <a:avLst/>
+          </a:prstGeom>
+          <a:noFill/>
+        </p:spPr>
+        <p:txBody>
+          <a:bodyPr wrap="none" lIns="0" tIns="0" rIns="0" bIns="0">
+            <a:spAutoFit/>
+          </a:bodyPr>
+          <a:lstStyle/>
+          <a:p>
+            <a:pPr algn="l">
+              <a:spcBef>
+                <a:spcPts val="0"/>
+              </a:spcBef>
+              <a:spcAft>
+                <a:spcPts val="0"/>
+              </a:spcAft>
+            </a:pPr>
+            <a:r>
+              <a:rPr sz="900">
+                <a:solidFill>
+                  <a:srgbClr val="8B949E"/>
+                </a:solidFill>
+                <a:latin typeface="Segoe UI"/>
+              </a:rPr>
+              <a:t>③ 図表・レイアウトを手作業で整える</a:t>
+            </a:r>
+          </a:p>
+        </p:txBody>
+      </p:sp>
+      <p:sp>
+        <p:nvSpPr>
+          <p:cNvPr id="15" name="TextBox 14"/>
+          <p:cNvSpPr txBox="1"/>
+          <p:nvPr/>
+        </p:nvSpPr>
+        <p:spPr>
+          <a:xfrm>
+            <a:off x="714375" y="2779395"/>
+            <a:ext cx="1524190" cy="160019"/>
+          </a:xfrm>
+          <a:prstGeom prst="rect">
+            <a:avLst/>
+          </a:prstGeom>
+          <a:noFill/>
+        </p:spPr>
+        <p:txBody>
+          <a:bodyPr wrap="none" lIns="0" tIns="0" rIns="0" bIns="0">
+            <a:spAutoFit/>
+          </a:bodyPr>
+          <a:lstStyle/>
+          <a:p>
+            <a:pPr algn="l">
+              <a:spcBef>
+                <a:spcPts val="0"/>
+              </a:spcBef>
+              <a:spcAft>
+                <a:spcPts val="0"/>
+              </a:spcAft>
+            </a:pPr>
+            <a:r>
+              <a:rPr sz="900">
+                <a:solidFill>
+                  <a:srgbClr val="8B949E"/>
+                </a:solidFill>
+                <a:latin typeface="Segoe UI"/>
+              </a:rPr>
+              <a:t>④ レビュー・修正を繰り返す</a:t>
+            </a:r>
+          </a:p>
+        </p:txBody>
+      </p:sp>
+      <p:sp>
+        <p:nvSpPr>
+          <p:cNvPr id="16" name="Rounded Rectangle 15"/>
+          <p:cNvSpPr/>
+          <p:nvPr/>
+        </p:nvSpPr>
+        <p:spPr>
+          <a:xfrm>
+            <a:off x="4762500" y="1238250"/>
+            <a:ext cx="4000500" cy="1714500"/>
+          </a:xfrm>
+          <a:prstGeom prst="roundRect">
+            <a:avLst>
+              <a:gd name="adj" fmla="val 4444"/>
+            </a:avLst>
+          </a:prstGeom>
+          <a:solidFill>
+            <a:srgbClr val="161B22"/>
+          </a:solidFill>
+          <a:ln w="12700">
+            <a:solidFill>
+              <a:srgbClr val="30363D"/>
+            </a:solidFill>
+          </a:ln>
+          <a:effectLst/>
+        </p:spPr>
+        <p:style>
+          <a:lnRef idx="1">
+            <a:schemeClr val="accent1"/>
+          </a:lnRef>
+          <a:fillRef idx="3">
+            <a:schemeClr val="accent1"/>
+          </a:fillRef>
+          <a:effectRef idx="2">
+            <a:schemeClr val="accent1"/>
+          </a:effectRef>
+          <a:fontRef idx="minor">
+            <a:schemeClr val="lt1"/>
+          </a:fontRef>
+        </p:style>
+        <p:txBody>
+          <a:bodyPr rtlCol="0" anchor="ctr"/>
+          <a:lstStyle/>
+          <a:p>
+            <a:pPr algn="ctr"/>
+          </a:p>
+        </p:txBody>
+      </p:sp>
+      <p:sp>
+        <p:nvSpPr>
+          <p:cNvPr id="17" name="TextBox 16"/>
+          <p:cNvSpPr txBox="1"/>
+          <p:nvPr/>
+        </p:nvSpPr>
+        <p:spPr>
+          <a:xfrm>
+            <a:off x="4953000" y="1378267"/>
+            <a:ext cx="792099" cy="240030"/>
+          </a:xfrm>
+          <a:prstGeom prst="rect">
+            <a:avLst/>
+          </a:prstGeom>
+          <a:noFill/>
+        </p:spPr>
+        <p:txBody>
+          <a:bodyPr wrap="none" lIns="0" tIns="0" rIns="0" bIns="0">
+            <a:spAutoFit/>
+          </a:bodyPr>
+          <a:lstStyle/>
+          <a:p>
+            <a:pPr algn="l">
+              <a:spcBef>
+                <a:spcPts val="0"/>
+              </a:spcBef>
+              <a:spcAft>
+                <a:spcPts val="0"/>
+              </a:spcAft>
+            </a:pPr>
+            <a:r>
+              <a:rPr sz="1350" b="1">
+                <a:solidFill>
+                  <a:srgbClr val="3FB950"/>
+                </a:solidFill>
+                <a:latin typeface="Segoe UI"/>
+              </a:rPr>
+              <a:t>Solution</a:t>
+            </a:r>
+          </a:p>
+        </p:txBody>
+      </p:sp>
+      <p:sp>
+        <p:nvSpPr>
+          <p:cNvPr id="18" name="TextBox 17"/>
+          <p:cNvSpPr txBox="1"/>
+          <p:nvPr/>
+        </p:nvSpPr>
+        <p:spPr>
+          <a:xfrm>
+            <a:off x="4953000" y="1723548"/>
+            <a:ext cx="2496312" cy="173355"/>
+          </a:xfrm>
+          <a:prstGeom prst="rect">
+            <a:avLst/>
+          </a:prstGeom>
+          <a:noFill/>
+        </p:spPr>
+        <p:txBody>
+          <a:bodyPr wrap="none" lIns="0" tIns="0" rIns="0" bIns="0">
+            <a:spAutoFit/>
+          </a:bodyPr>
+          <a:lstStyle/>
+          <a:p>
+            <a:pPr algn="l">
+              <a:spcBef>
+                <a:spcPts val="0"/>
+              </a:spcBef>
+              <a:spcAft>
+                <a:spcPts val="0"/>
+              </a:spcAft>
+            </a:pPr>
+            <a:r>
+              <a:rPr sz="975">
+                <a:solidFill>
+                  <a:srgbClr val="C9D1D9"/>
+                </a:solidFill>
+                <a:latin typeface="Segoe UI"/>
+              </a:rPr>
+              <a:t>プロンプト 1 行で調査から PPTX 生成まで</a:t>
+            </a:r>
+          </a:p>
+        </p:txBody>
+      </p:sp>
+      <p:sp>
+        <p:nvSpPr>
+          <p:cNvPr id="19" name="TextBox 18"/>
+          <p:cNvSpPr txBox="1"/>
+          <p:nvPr/>
+        </p:nvSpPr>
+        <p:spPr>
+          <a:xfrm>
+            <a:off x="4953000" y="1914048"/>
+            <a:ext cx="1397674" cy="173355"/>
+          </a:xfrm>
+          <a:prstGeom prst="rect">
+            <a:avLst/>
+          </a:prstGeom>
+          <a:noFill/>
+        </p:spPr>
+        <p:txBody>
+          <a:bodyPr wrap="none" lIns="0" tIns="0" rIns="0" bIns="0">
+            <a:spAutoFit/>
+          </a:bodyPr>
+          <a:lstStyle/>
+          <a:p>
+            <a:pPr algn="l">
+              <a:spcBef>
+                <a:spcPts val="0"/>
+              </a:spcBef>
+              <a:spcAft>
+                <a:spcPts val="0"/>
+              </a:spcAft>
+            </a:pPr>
+            <a:r>
+              <a:rPr sz="975">
+                <a:solidFill>
+                  <a:srgbClr val="C9D1D9"/>
+                </a:solidFill>
+                <a:latin typeface="Segoe UI"/>
+              </a:rPr>
+              <a:t>全自動。約 10 分で完了</a:t>
+            </a:r>
+          </a:p>
+        </p:txBody>
+      </p:sp>
+      <p:sp>
+        <p:nvSpPr>
+          <p:cNvPr id="20" name="TextBox 19"/>
+          <p:cNvSpPr txBox="1"/>
+          <p:nvPr/>
+        </p:nvSpPr>
+        <p:spPr>
+          <a:xfrm>
+            <a:off x="5095875" y="2207895"/>
+            <a:ext cx="2316289" cy="160019"/>
+          </a:xfrm>
+          <a:prstGeom prst="rect">
+            <a:avLst/>
+          </a:prstGeom>
+          <a:noFill/>
+        </p:spPr>
+        <p:txBody>
+          <a:bodyPr wrap="none" lIns="0" tIns="0" rIns="0" bIns="0">
+            <a:spAutoFit/>
+          </a:bodyPr>
+          <a:lstStyle/>
+          <a:p>
+            <a:pPr algn="l">
+              <a:spcBef>
+                <a:spcPts val="0"/>
+              </a:spcBef>
+              <a:spcAft>
+                <a:spcPts val="0"/>
+              </a:spcAft>
+            </a:pPr>
+            <a:r>
+              <a:rPr sz="900">
+                <a:solidFill>
+                  <a:srgbClr val="8B949E"/>
+                </a:solidFill>
+                <a:latin typeface="Segoe UI"/>
+              </a:rPr>
+              <a:t>✅ Copilot SDK が MS Learn を自動調査</a:t>
+            </a:r>
+          </a:p>
+        </p:txBody>
+      </p:sp>
+      <p:sp>
+        <p:nvSpPr>
+          <p:cNvPr id="21" name="TextBox 20"/>
+          <p:cNvSpPr txBox="1"/>
+          <p:nvPr/>
+        </p:nvSpPr>
+        <p:spPr>
+          <a:xfrm>
+            <a:off x="5095875" y="2398395"/>
+            <a:ext cx="2304288" cy="160019"/>
+          </a:xfrm>
+          <a:prstGeom prst="rect">
+            <a:avLst/>
+          </a:prstGeom>
+          <a:noFill/>
+        </p:spPr>
+        <p:txBody>
+          <a:bodyPr wrap="none" lIns="0" tIns="0" rIns="0" bIns="0">
+            <a:spAutoFit/>
+          </a:bodyPr>
+          <a:lstStyle/>
+          <a:p>
+            <a:pPr algn="l">
+              <a:spcBef>
+                <a:spcPts val="0"/>
+              </a:spcBef>
+              <a:spcAft>
+                <a:spcPts val="0"/>
+              </a:spcAft>
+            </a:pPr>
+            <a:r>
+              <a:rPr sz="900">
+                <a:solidFill>
+                  <a:srgbClr val="8B949E"/>
+                </a:solidFill>
+                <a:latin typeface="Segoe UI"/>
+              </a:rPr>
+              <a:t>✅ AI が SVG スライドを生成（図表込み）</a:t>
+            </a:r>
+          </a:p>
+        </p:txBody>
+      </p:sp>
+      <p:sp>
+        <p:nvSpPr>
+          <p:cNvPr id="22" name="TextBox 21"/>
+          <p:cNvSpPr txBox="1"/>
+          <p:nvPr/>
+        </p:nvSpPr>
+        <p:spPr>
+          <a:xfrm>
+            <a:off x="5095875" y="2588895"/>
+            <a:ext cx="2394299" cy="160019"/>
+          </a:xfrm>
+          <a:prstGeom prst="rect">
+            <a:avLst/>
+          </a:prstGeom>
+          <a:noFill/>
+        </p:spPr>
+        <p:txBody>
+          <a:bodyPr wrap="none" lIns="0" tIns="0" rIns="0" bIns="0">
+            <a:spAutoFit/>
+          </a:bodyPr>
+          <a:lstStyle/>
+          <a:p>
+            <a:pPr algn="l">
+              <a:spcBef>
+                <a:spcPts val="0"/>
+              </a:spcBef>
+              <a:spcAft>
+                <a:spcPts val="0"/>
+              </a:spcAft>
+            </a:pPr>
+            <a:r>
+              <a:rPr sz="900">
+                <a:solidFill>
+                  <a:srgbClr val="8B949E"/>
+                </a:solidFill>
+                <a:latin typeface="Segoe UI"/>
+              </a:rPr>
+              <a:t>✅ svg2pptx.py で編集可能な PPTX に変換</a:t>
+            </a:r>
+          </a:p>
+        </p:txBody>
+      </p:sp>
+      <p:sp>
+        <p:nvSpPr>
+          <p:cNvPr id="23" name="TextBox 22"/>
+          <p:cNvSpPr txBox="1"/>
+          <p:nvPr/>
+        </p:nvSpPr>
+        <p:spPr>
+          <a:xfrm>
+            <a:off x="5095875" y="2779395"/>
+            <a:ext cx="2376297" cy="160019"/>
+          </a:xfrm>
+          <a:prstGeom prst="rect">
+            <a:avLst/>
+          </a:prstGeom>
+          <a:noFill/>
+        </p:spPr>
+        <p:txBody>
+          <a:bodyPr wrap="none" lIns="0" tIns="0" rIns="0" bIns="0">
+            <a:spAutoFit/>
+          </a:bodyPr>
+          <a:lstStyle/>
+          <a:p>
+            <a:pPr algn="l">
+              <a:spcBef>
+                <a:spcPts val="0"/>
+              </a:spcBef>
+              <a:spcAft>
+                <a:spcPts val="0"/>
+              </a:spcAft>
+            </a:pPr>
+            <a:r>
+              <a:rPr sz="900">
+                <a:solidFill>
+                  <a:srgbClr val="8B949E"/>
+                </a:solidFill>
+                <a:latin typeface="Segoe UI"/>
+              </a:rPr>
+              <a:t>✅ Azure Blob 経由で Web アプリから取得</a:t>
+            </a:r>
+          </a:p>
+        </p:txBody>
+      </p:sp>
+      <p:cxnSp>
+        <p:nvCxnSpPr>
+          <p:cNvPr id="24" name="Connector 23"/>
+          <p:cNvCxnSpPr/>
+          <p:nvPr/>
+        </p:nvCxnSpPr>
+        <p:spPr>
+          <a:xfrm>
+            <a:off x="4429125" y="2095500"/>
+            <a:ext cx="285750" cy="0"/>
+          </a:xfrm>
+          <a:prstGeom prst="line">
+            <a:avLst/>
+          </a:prstGeom>
+          <a:ln w="25400">
+            <a:solidFill>
+              <a:srgbClr val="6E40C9"/>
+            </a:solidFill>
+          </a:ln>
+        </p:spPr>
+        <p:style>
+          <a:lnRef idx="2">
+            <a:schemeClr val="accent1"/>
+          </a:lnRef>
+          <a:fillRef idx="0">
+            <a:schemeClr val="accent1"/>
+          </a:fillRef>
+          <a:effectRef idx="1">
+            <a:schemeClr val="accent1"/>
+          </a:effectRef>
+          <a:fontRef idx="minor">
+            <a:schemeClr val="tx1"/>
+          </a:fontRef>
+        </p:style>
+      </p:cxnSp>
+      <p:sp>
+        <p:nvSpPr>
+          <p:cNvPr id="25" name="Freeform 24"/>
+          <p:cNvSpPr/>
+          <p:nvPr/>
+        </p:nvSpPr>
+        <p:spPr>
+          <a:xfrm>
+            <a:off x="4714875" y="2047875"/>
+            <a:ext cx="95250" cy="95250"/>
+          </a:xfrm>
+          <a:custGeom>
+            <a:avLst/>
+            <a:gdLst/>
+            <a:ahLst/>
+            <a:cxnLst/>
+            <a:rect l="l" t="t" r="r" b="b"/>
+            <a:pathLst>
+              <a:path w="95250" h="95250">
+                <a:moveTo>
+                  <a:pt x="0" y="0"/>
+                </a:moveTo>
+                <a:lnTo>
+                  <a:pt x="95250" y="47625"/>
+                </a:lnTo>
+                <a:lnTo>
+                  <a:pt x="0" y="95250"/>
+                </a:lnTo>
+                <a:lnTo>
+                  <a:pt x="0" y="0"/>
+                </a:lnTo>
+                <a:close/>
+              </a:path>
+            </a:pathLst>
+          </a:custGeom>
+          <a:solidFill>
+            <a:srgbClr val="6E40C9"/>
+          </a:solidFill>
+          <a:ln>
+            <a:noFill/>
+          </a:ln>
+          <a:effectLst/>
+        </p:spPr>
+        <p:style>
+          <a:lnRef idx="1">
+            <a:schemeClr val="accent1"/>
+          </a:lnRef>
+          <a:fillRef idx="3">
+            <a:schemeClr val="accent1"/>
+          </a:fillRef>
+          <a:effectRef idx="2">
+            <a:schemeClr val="accent1"/>
+          </a:effectRef>
+          <a:fontRef idx="minor">
+            <a:schemeClr val="lt1"/>
+          </a:fontRef>
+        </p:style>
+        <p:txBody>
+          <a:bodyPr rtlCol="0" anchor="ctr"/>
+          <a:lstStyle/>
+          <a:p>
+            <a:pPr algn="ctr"/>
+          </a:p>
+        </p:txBody>
+      </p:sp>
+      <p:sp>
+        <p:nvSpPr>
+          <p:cNvPr id="26" name="Rounded Rectangle 25"/>
+          <p:cNvSpPr/>
+          <p:nvPr/>
+        </p:nvSpPr>
+        <p:spPr>
+          <a:xfrm>
+            <a:off x="381000" y="3143250"/>
+            <a:ext cx="8382000" cy="857250"/>
+          </a:xfrm>
+          <a:prstGeom prst="roundRect">
+            <a:avLst>
+              <a:gd name="adj" fmla="val 8888"/>
+            </a:avLst>
+          </a:prstGeom>
+          <a:solidFill>
+            <a:srgbClr val="161B22"/>
+          </a:solidFill>
+          <a:ln w="12700">
+            <a:solidFill>
+              <a:srgbClr val="30363D"/>
+            </a:solidFill>
+          </a:ln>
+          <a:effectLst/>
+        </p:spPr>
+        <p:style>
+          <a:lnRef idx="1">
+            <a:schemeClr val="accent1"/>
+          </a:lnRef>
+          <a:fillRef idx="3">
+            <a:schemeClr val="accent1"/>
+          </a:fillRef>
+          <a:effectRef idx="2">
+            <a:schemeClr val="accent1"/>
+          </a:effectRef>
+          <a:fontRef idx="minor">
+            <a:schemeClr val="lt1"/>
+          </a:fontRef>
+        </p:style>
+        <p:txBody>
+          <a:bodyPr rtlCol="0" anchor="ctr"/>
+          <a:lstStyle/>
+          <a:p>
+            <a:pPr algn="ctr"/>
+          </a:p>
+        </p:txBody>
+      </p:sp>
+      <p:sp>
+        <p:nvSpPr>
+          <p:cNvPr id="27" name="TextBox 26"/>
+          <p:cNvSpPr txBox="1"/>
+          <p:nvPr/>
+        </p:nvSpPr>
+        <p:spPr>
+          <a:xfrm>
+            <a:off x="571500" y="3299460"/>
+            <a:ext cx="1672209" cy="213360"/>
+          </a:xfrm>
+          <a:prstGeom prst="rect">
+            <a:avLst/>
+          </a:prstGeom>
+          <a:noFill/>
+        </p:spPr>
+        <p:txBody>
+          <a:bodyPr wrap="none" lIns="0" tIns="0" rIns="0" bIns="0">
+            <a:spAutoFit/>
+          </a:bodyPr>
+          <a:lstStyle/>
+          <a:p>
+            <a:pPr algn="l">
+              <a:spcBef>
+                <a:spcPts val="0"/>
+              </a:spcBef>
+              <a:spcAft>
+                <a:spcPts val="0"/>
+              </a:spcAft>
+            </a:pPr>
+            <a:r>
+              <a:rPr sz="1200" b="1">
+                <a:solidFill>
+                  <a:srgbClr val="58A6FF"/>
+                </a:solidFill>
+                <a:latin typeface="Segoe UI"/>
+              </a:rPr>
+              <a:t>Key Differentiators</a:t>
+            </a:r>
+          </a:p>
+        </p:txBody>
+      </p:sp>
+      <p:sp>
+        <p:nvSpPr>
+          <p:cNvPr id="28" name="Rounded Rectangle 27"/>
+          <p:cNvSpPr/>
+          <p:nvPr/>
+        </p:nvSpPr>
+        <p:spPr>
+          <a:xfrm>
+            <a:off x="571500" y="3571875"/>
+            <a:ext cx="1905000" cy="304800"/>
+          </a:xfrm>
+          <a:prstGeom prst="roundRect">
+            <a:avLst>
+              <a:gd name="adj" fmla="val 12500"/>
+            </a:avLst>
+          </a:prstGeom>
+          <a:solidFill>
+            <a:srgbClr val="1F2937"/>
+          </a:solidFill>
+          <a:ln>
+            <a:noFill/>
+          </a:ln>
+          <a:effectLst/>
+        </p:spPr>
+        <p:style>
+          <a:lnRef idx="1">
+            <a:schemeClr val="accent1"/>
+          </a:lnRef>
+          <a:fillRef idx="3">
+            <a:schemeClr val="accent1"/>
+          </a:fillRef>
+          <a:effectRef idx="2">
+            <a:schemeClr val="accent1"/>
+          </a:effectRef>
+          <a:fontRef idx="minor">
+            <a:schemeClr val="lt1"/>
+          </a:fontRef>
+        </p:style>
+        <p:txBody>
+          <a:bodyPr rtlCol="0" anchor="ctr"/>
+          <a:lstStyle/>
+          <a:p>
+            <a:pPr algn="ctr"/>
+          </a:p>
+        </p:txBody>
+      </p:sp>
+      <p:sp>
+        <p:nvSpPr>
+          <p:cNvPr id="29" name="TextBox 28"/>
+          <p:cNvSpPr txBox="1"/>
+          <p:nvPr/>
+        </p:nvSpPr>
+        <p:spPr>
+          <a:xfrm>
+            <a:off x="666750" y="3682841"/>
+            <a:ext cx="1738217" cy="146685"/>
+          </a:xfrm>
+          <a:prstGeom prst="rect">
+            <a:avLst/>
+          </a:prstGeom>
+          <a:noFill/>
+        </p:spPr>
+        <p:txBody>
+          <a:bodyPr wrap="none" lIns="0" tIns="0" rIns="0" bIns="0">
+            <a:spAutoFit/>
+          </a:bodyPr>
+          <a:lstStyle/>
+          <a:p>
+            <a:pPr algn="l">
+              <a:spcBef>
+                <a:spcPts val="0"/>
+              </a:spcBef>
+              <a:spcAft>
+                <a:spcPts val="0"/>
+              </a:spcAft>
+            </a:pPr>
+            <a:r>
+              <a:rPr sz="825">
+                <a:solidFill>
+                  <a:srgbClr val="C9D1D9"/>
+                </a:solidFill>
+                <a:latin typeface="Segoe UI"/>
+              </a:rPr>
+              <a:t>📝 Editable PPTX (not images)</a:t>
+            </a:r>
+          </a:p>
+        </p:txBody>
+      </p:sp>
+      <p:sp>
+        <p:nvSpPr>
+          <p:cNvPr id="30" name="Rounded Rectangle 29"/>
+          <p:cNvSpPr/>
+          <p:nvPr/>
+        </p:nvSpPr>
+        <p:spPr>
+          <a:xfrm>
+            <a:off x="2667000" y="3571875"/>
+            <a:ext cx="1905000" cy="304800"/>
+          </a:xfrm>
+          <a:prstGeom prst="roundRect">
+            <a:avLst>
+              <a:gd name="adj" fmla="val 12500"/>
+            </a:avLst>
+          </a:prstGeom>
+          <a:solidFill>
+            <a:srgbClr val="1F2937"/>
+          </a:solidFill>
+          <a:ln>
+            <a:noFill/>
+          </a:ln>
+          <a:effectLst/>
+        </p:spPr>
+        <p:style>
+          <a:lnRef idx="1">
+            <a:schemeClr val="accent1"/>
+          </a:lnRef>
+          <a:fillRef idx="3">
+            <a:schemeClr val="accent1"/>
+          </a:fillRef>
+          <a:effectRef idx="2">
+            <a:schemeClr val="accent1"/>
+          </a:effectRef>
+          <a:fontRef idx="minor">
+            <a:schemeClr val="lt1"/>
+          </a:fontRef>
+        </p:style>
+        <p:txBody>
+          <a:bodyPr rtlCol="0" anchor="ctr"/>
+          <a:lstStyle/>
+          <a:p>
+            <a:pPr algn="ctr"/>
+          </a:p>
+        </p:txBody>
+      </p:sp>
+      <p:sp>
+        <p:nvSpPr>
+          <p:cNvPr id="31" name="TextBox 30"/>
+          <p:cNvSpPr txBox="1"/>
+          <p:nvPr/>
+        </p:nvSpPr>
+        <p:spPr>
+          <a:xfrm>
+            <a:off x="2762250" y="3682841"/>
+            <a:ext cx="1314664" cy="146685"/>
+          </a:xfrm>
+          <a:prstGeom prst="rect">
+            <a:avLst/>
+          </a:prstGeom>
+          <a:noFill/>
+        </p:spPr>
+        <p:txBody>
+          <a:bodyPr wrap="none" lIns="0" tIns="0" rIns="0" bIns="0">
+            <a:spAutoFit/>
+          </a:bodyPr>
+          <a:lstStyle/>
+          <a:p>
+            <a:pPr algn="l">
+              <a:spcBef>
+                <a:spcPts val="0"/>
+              </a:spcBef>
+              <a:spcAft>
+                <a:spcPts val="0"/>
+              </a:spcAft>
+            </a:pPr>
+            <a:r>
+              <a:rPr sz="825">
+                <a:solidFill>
+                  <a:srgbClr val="C9D1D9"/>
+                </a:solidFill>
+                <a:latin typeface="Segoe UI"/>
+              </a:rPr>
+              <a:t>🔄 SDK Retry + Timeout</a:t>
+            </a:r>
+          </a:p>
+        </p:txBody>
+      </p:sp>
+      <p:sp>
+        <p:nvSpPr>
+          <p:cNvPr id="32" name="Rounded Rectangle 31"/>
+          <p:cNvSpPr/>
+          <p:nvPr/>
+        </p:nvSpPr>
+        <p:spPr>
+          <a:xfrm>
+            <a:off x="4762500" y="3571875"/>
+            <a:ext cx="1905000" cy="304800"/>
+          </a:xfrm>
+          <a:prstGeom prst="roundRect">
+            <a:avLst>
+              <a:gd name="adj" fmla="val 12500"/>
+            </a:avLst>
+          </a:prstGeom>
+          <a:solidFill>
+            <a:srgbClr val="1F2937"/>
+          </a:solidFill>
+          <a:ln>
+            <a:noFill/>
+          </a:ln>
+          <a:effectLst/>
+        </p:spPr>
+        <p:style>
+          <a:lnRef idx="1">
+            <a:schemeClr val="accent1"/>
+          </a:lnRef>
+          <a:fillRef idx="3">
+            <a:schemeClr val="accent1"/>
+          </a:fillRef>
+          <a:effectRef idx="2">
+            <a:schemeClr val="accent1"/>
+          </a:effectRef>
+          <a:fontRef idx="minor">
+            <a:schemeClr val="lt1"/>
+          </a:fontRef>
+        </p:style>
+        <p:txBody>
+          <a:bodyPr rtlCol="0" anchor="ctr"/>
+          <a:lstStyle/>
+          <a:p>
+            <a:pPr algn="ctr"/>
+          </a:p>
+        </p:txBody>
+      </p:sp>
+      <p:sp>
+        <p:nvSpPr>
+          <p:cNvPr id="33" name="TextBox 32"/>
+          <p:cNvSpPr txBox="1"/>
+          <p:nvPr/>
+        </p:nvSpPr>
+        <p:spPr>
+          <a:xfrm>
+            <a:off x="4857750" y="3682841"/>
+            <a:ext cx="1617202" cy="146685"/>
+          </a:xfrm>
+          <a:prstGeom prst="rect">
+            <a:avLst/>
+          </a:prstGeom>
+          <a:noFill/>
+        </p:spPr>
+        <p:txBody>
+          <a:bodyPr wrap="none" lIns="0" tIns="0" rIns="0" bIns="0">
+            <a:spAutoFit/>
+          </a:bodyPr>
+          <a:lstStyle/>
+          <a:p>
+            <a:pPr algn="l">
+              <a:spcBef>
+                <a:spcPts val="0"/>
+              </a:spcBef>
+              <a:spcAft>
+                <a:spcPts val="0"/>
+              </a:spcAft>
+            </a:pPr>
+            <a:r>
+              <a:rPr sz="825">
+                <a:solidFill>
+                  <a:srgbClr val="C9D1D9"/>
+                </a:solidFill>
+                <a:latin typeface="Segoe UI"/>
+              </a:rPr>
+              <a:t>📚 MS Learn MCP (live data)</a:t>
+            </a:r>
+          </a:p>
+        </p:txBody>
+      </p:sp>
+      <p:sp>
+        <p:nvSpPr>
+          <p:cNvPr id="34" name="Rounded Rectangle 33"/>
+          <p:cNvSpPr/>
+          <p:nvPr/>
+        </p:nvSpPr>
+        <p:spPr>
+          <a:xfrm>
+            <a:off x="6858000" y="3571875"/>
+            <a:ext cx="1905000" cy="304800"/>
+          </a:xfrm>
+          <a:prstGeom prst="roundRect">
+            <a:avLst>
+              <a:gd name="adj" fmla="val 12500"/>
+            </a:avLst>
+          </a:prstGeom>
+          <a:solidFill>
+            <a:srgbClr val="1F2937"/>
+          </a:solidFill>
+          <a:ln>
+            <a:noFill/>
+          </a:ln>
+          <a:effectLst/>
+        </p:spPr>
+        <p:style>
+          <a:lnRef idx="1">
+            <a:schemeClr val="accent1"/>
+          </a:lnRef>
+          <a:fillRef idx="3">
+            <a:schemeClr val="accent1"/>
+          </a:fillRef>
+          <a:effectRef idx="2">
+            <a:schemeClr val="accent1"/>
+          </a:effectRef>
+          <a:fontRef idx="minor">
+            <a:schemeClr val="lt1"/>
+          </a:fontRef>
+        </p:style>
+        <p:txBody>
+          <a:bodyPr rtlCol="0" anchor="ctr"/>
+          <a:lstStyle/>
+          <a:p>
+            <a:pPr algn="ctr"/>
+          </a:p>
+        </p:txBody>
+      </p:sp>
+      <p:sp>
+        <p:nvSpPr>
+          <p:cNvPr id="35" name="TextBox 34"/>
+          <p:cNvSpPr txBox="1"/>
+          <p:nvPr/>
+        </p:nvSpPr>
+        <p:spPr>
+          <a:xfrm>
+            <a:off x="6953250" y="3682841"/>
+            <a:ext cx="1595199" cy="146685"/>
+          </a:xfrm>
+          <a:prstGeom prst="rect">
+            <a:avLst/>
+          </a:prstGeom>
+          <a:noFill/>
+        </p:spPr>
+        <p:txBody>
+          <a:bodyPr wrap="none" lIns="0" tIns="0" rIns="0" bIns="0">
+            <a:spAutoFit/>
+          </a:bodyPr>
+          <a:lstStyle/>
+          <a:p>
+            <a:pPr algn="l">
+              <a:spcBef>
+                <a:spcPts val="0"/>
+              </a:spcBef>
+              <a:spcAft>
+                <a:spcPts val="0"/>
+              </a:spcAft>
+            </a:pPr>
+            <a:r>
+              <a:rPr sz="825">
+                <a:solidFill>
+                  <a:srgbClr val="C9D1D9"/>
+                </a:solidFill>
+                <a:latin typeface="Segoe UI"/>
+              </a:rPr>
+              <a:t>⚙️ CI/CD on GitHub Actions</a:t>
+            </a:r>
+          </a:p>
+        </p:txBody>
+      </p:sp>
+      <p:sp>
+        <p:nvSpPr>
+          <p:cNvPr id="36" name="Rounded Rectangle 35"/>
+          <p:cNvSpPr/>
+          <p:nvPr/>
+        </p:nvSpPr>
+        <p:spPr>
+          <a:xfrm>
+            <a:off x="381000" y="4191000"/>
+            <a:ext cx="8382000" cy="762000"/>
+          </a:xfrm>
+          <a:prstGeom prst="roundRect">
+            <a:avLst>
+              <a:gd name="adj" fmla="val 10000"/>
+            </a:avLst>
+          </a:prstGeom>
+          <a:solidFill>
+            <a:srgbClr val="161B22"/>
+          </a:solidFill>
+          <a:ln w="12700">
+            <a:solidFill>
+              <a:srgbClr val="30363D"/>
+            </a:solidFill>
+          </a:ln>
+          <a:effectLst/>
+        </p:spPr>
+        <p:style>
+          <a:lnRef idx="1">
+            <a:schemeClr val="accent1"/>
+          </a:lnRef>
+          <a:fillRef idx="3">
+            <a:schemeClr val="accent1"/>
+          </a:fillRef>
+          <a:effectRef idx="2">
+            <a:schemeClr val="accent1"/>
+          </a:effectRef>
+          <a:fontRef idx="minor">
+            <a:schemeClr val="lt1"/>
+          </a:fontRef>
+        </p:style>
+        <p:txBody>
+          <a:bodyPr rtlCol="0" anchor="ctr"/>
+          <a:lstStyle/>
+          <a:p>
+            <a:pPr algn="ctr"/>
+          </a:p>
+        </p:txBody>
+      </p:sp>
+      <p:sp>
+        <p:nvSpPr>
+          <p:cNvPr id="37" name="TextBox 36"/>
+          <p:cNvSpPr txBox="1"/>
+          <p:nvPr/>
+        </p:nvSpPr>
+        <p:spPr>
+          <a:xfrm>
+            <a:off x="571500" y="4347210"/>
+            <a:ext cx="2200275" cy="213360"/>
+          </a:xfrm>
+          <a:prstGeom prst="rect">
+            <a:avLst/>
+          </a:prstGeom>
+          <a:noFill/>
+        </p:spPr>
+        <p:txBody>
+          <a:bodyPr wrap="none" lIns="0" tIns="0" rIns="0" bIns="0">
+            <a:spAutoFit/>
+          </a:bodyPr>
+          <a:lstStyle/>
+          <a:p>
+            <a:pPr algn="l">
+              <a:spcBef>
+                <a:spcPts val="0"/>
+              </a:spcBef>
+              <a:spcAft>
+                <a:spcPts val="0"/>
+              </a:spcAft>
+            </a:pPr>
+            <a:r>
+              <a:rPr sz="1200" b="1">
+                <a:solidFill>
+                  <a:srgbClr val="D2A8FF"/>
+                </a:solidFill>
+                <a:latin typeface="Segoe UI"/>
+              </a:rPr>
+              <a:t>Enterprise Business Value</a:t>
+            </a:r>
+          </a:p>
+        </p:txBody>
+      </p:sp>
+      <p:sp>
+        <p:nvSpPr>
+          <p:cNvPr id="38" name="TextBox 37"/>
+          <p:cNvSpPr txBox="1"/>
+          <p:nvPr/>
+        </p:nvSpPr>
+        <p:spPr>
+          <a:xfrm>
+            <a:off x="571500" y="4657248"/>
+            <a:ext cx="1670708" cy="173355"/>
+          </a:xfrm>
+          <a:prstGeom prst="rect">
+            <a:avLst/>
+          </a:prstGeom>
+          <a:noFill/>
+        </p:spPr>
+        <p:txBody>
+          <a:bodyPr wrap="none" lIns="0" tIns="0" rIns="0" bIns="0">
+            <a:spAutoFit/>
+          </a:bodyPr>
+          <a:lstStyle/>
+          <a:p>
+            <a:pPr algn="l">
+              <a:spcBef>
+                <a:spcPts val="0"/>
+              </a:spcBef>
+              <a:spcAft>
+                <a:spcPts val="0"/>
+              </a:spcAft>
+            </a:pPr>
+            <a:r>
+              <a:rPr sz="975">
+                <a:solidFill>
+                  <a:srgbClr val="C9D1D9"/>
+                </a:solidFill>
+                <a:latin typeface="Segoe UI"/>
+              </a:rPr>
+              <a:t>⏱ 2-3h → 10min per deck</a:t>
+            </a:r>
+          </a:p>
+        </p:txBody>
+      </p:sp>
+      <p:sp>
+        <p:nvSpPr>
+          <p:cNvPr id="39" name="TextBox 38"/>
+          <p:cNvSpPr txBox="1"/>
+          <p:nvPr/>
+        </p:nvSpPr>
+        <p:spPr>
+          <a:xfrm>
+            <a:off x="2857500" y="4657248"/>
+            <a:ext cx="2411801" cy="173355"/>
+          </a:xfrm>
+          <a:prstGeom prst="rect">
+            <a:avLst/>
+          </a:prstGeom>
+          <a:noFill/>
+        </p:spPr>
+        <p:txBody>
+          <a:bodyPr wrap="none" lIns="0" tIns="0" rIns="0" bIns="0">
+            <a:spAutoFit/>
+          </a:bodyPr>
+          <a:lstStyle/>
+          <a:p>
+            <a:pPr algn="l">
+              <a:spcBef>
+                <a:spcPts val="0"/>
+              </a:spcBef>
+              <a:spcAft>
+                <a:spcPts val="0"/>
+              </a:spcAft>
+            </a:pPr>
+            <a:r>
+              <a:rPr sz="975">
+                <a:solidFill>
+                  <a:srgbClr val="C9D1D9"/>
+                </a:solidFill>
+                <a:latin typeface="Segoe UI"/>
+              </a:rPr>
+              <a:t>🔁 Reusable across any Azure topic</a:t>
+            </a:r>
+          </a:p>
+        </p:txBody>
+      </p:sp>
+      <p:sp>
+        <p:nvSpPr>
+          <p:cNvPr id="40" name="TextBox 39"/>
+          <p:cNvSpPr txBox="1"/>
+          <p:nvPr/>
+        </p:nvSpPr>
+        <p:spPr>
+          <a:xfrm>
+            <a:off x="5715000" y="4657248"/>
+            <a:ext cx="1794224" cy="173355"/>
+          </a:xfrm>
+          <a:prstGeom prst="rect">
+            <a:avLst/>
+          </a:prstGeom>
+          <a:noFill/>
+        </p:spPr>
+        <p:txBody>
+          <a:bodyPr wrap="none" lIns="0" tIns="0" rIns="0" bIns="0">
+            <a:spAutoFit/>
+          </a:bodyPr>
+          <a:lstStyle/>
+          <a:p>
+            <a:pPr algn="l">
+              <a:spcBef>
+                <a:spcPts val="0"/>
+              </a:spcBef>
+              <a:spcAft>
+                <a:spcPts val="0"/>
+              </a:spcAft>
+            </a:pPr>
+            <a:r>
+              <a:rPr sz="975">
+                <a:solidFill>
+                  <a:srgbClr val="C9D1D9"/>
+                </a:solidFill>
+                <a:latin typeface="Segoe UI"/>
+              </a:rPr>
+              <a:t>🏢 Team productivity × 10</a:t>
+            </a:r>
+          </a:p>
+        </p:txBody>
+      </p:sp>
+      <p:sp>
+        <p:nvSpPr>
+          <p:cNvPr id="41" name="Rounded Rectangle 40"/>
+          <p:cNvSpPr/>
+          <p:nvPr/>
+        </p:nvSpPr>
+        <p:spPr>
+          <a:xfrm>
+            <a:off x="7143750" y="228600"/>
+            <a:ext cx="1619250" cy="247650"/>
+          </a:xfrm>
+          <a:prstGeom prst="roundRect">
+            <a:avLst>
+              <a:gd name="adj" fmla="val 50000"/>
+            </a:avLst>
+          </a:prstGeom>
+          <a:solidFill>
+            <a:srgbClr val="6E40C9"/>
+          </a:solidFill>
+          <a:ln>
+            <a:noFill/>
+          </a:ln>
+          <a:effectLst/>
+        </p:spPr>
+        <p:style>
+          <a:lnRef idx="1">
+            <a:schemeClr val="accent1"/>
+          </a:lnRef>
+          <a:fillRef idx="3">
+            <a:schemeClr val="accent1"/>
+          </a:fillRef>
+          <a:effectRef idx="2">
+            <a:schemeClr val="accent1"/>
+          </a:effectRef>
+          <a:fontRef idx="minor">
+            <a:schemeClr val="lt1"/>
+          </a:fontRef>
+        </p:style>
+        <p:txBody>
+          <a:bodyPr rtlCol="0" anchor="ctr"/>
+          <a:lstStyle/>
+          <a:p>
+            <a:pPr algn="ctr"/>
+          </a:p>
+        </p:txBody>
+      </p:sp>
+      <p:sp>
+        <p:nvSpPr>
+          <p:cNvPr id="42" name="TextBox 41"/>
           <p:cNvSpPr txBox="1"/>
           <p:nvPr/>
         </p:nvSpPr>
